--- a/reports/west-bengal-sir-2026-deck.pptx
+++ b/reports/west-bengal-sir-2026-deck.pptx
@@ -3122,7 +3122,7 @@
           <a:p>
             <a:r>
               <a:rPr lang="en-US" dirty="0"/>
-              <a:t>The removals and their reasons are published for the state only. Below the state the deck measures the fall in the roll from 2024, which takes in ordinary changes as well as the revision and is a different count from the names struck off.</a:t>
+              <a:t>The Special Intensive Revision (SIR) is the Election Commission's house-to-house recheck of the electoral roll, the list of people entitled to vote. Adjudication means the names were kept off the final roll while judicial officers decided whether each elector was eligible. The removals and their reasons are published for the state only. Below the state the deck measures the fall in the roll from 2024, which takes in ordinary changes as well as the revision and is a different count from the names struck off.</a:t>
             </a:r>
             <a:endParaRPr lang="en-US" dirty="0"/>
           </a:p>
@@ -3210,7 +3210,7 @@
           <a:p>
             <a:r>
               <a:rPr lang="en-US" dirty="0"/>
-              <a:t>Over the margin means large enough to decide a seat, and says nothing about whether the fall did. Nobody can know how anyone missing from the roll would have voted.</a:t>
+              <a:t>Over the margin means large enough to decide a seat, and says nothing about whether the fall did. Nobody can know how anyone missing from the roll would have voted. A rank correlation runs from -1 to 1 and measures how far two orderings agree.</a:t>
             </a:r>
             <a:endParaRPr lang="en-US" dirty="0"/>
           </a:p>
@@ -3386,7 +3386,7 @@
           <a:p>
             <a:r>
               <a:rPr lang="en-US" dirty="0"/>
-              <a:t/>
+              <a:t>Against own district is each seat's figure less its district's, averaged over the party's seats. A minus means a smaller fall than the district as a whole.</a:t>
             </a:r>
             <a:endParaRPr lang="en-US" dirty="0"/>
           </a:p>
@@ -3914,7 +3914,7 @@
           <a:p>
             <a:r>
               <a:rPr lang="en-US" dirty="0"/>
-              <a:t/>
+              <a:t>Per 100 electors is the number for every 100 people on the earlier roll, which lets places of different size be compared. The fall in the roll is the earlier roll less the later one, so it counts names removed less names added, ordinary deaths and moves included. The winning margin is the winner's votes less the runner-up's.</a:t>
             </a:r>
             <a:endParaRPr lang="en-US" dirty="0"/>
           </a:p>
@@ -4002,7 +4002,7 @@
           <a:p>
             <a:r>
               <a:rPr lang="en-US" dirty="0"/>
-              <a:t>From press note PN-05-2026 and the roll at the 2026 nominations. The bars start above zero so that the changes can be seen. A reason on the list is what the officer wrote down, and nobody checked it.</a:t>
+              <a:t>A claim asks for a name to be added to the draft, and an objection asks for one to be removed. From press note PN-05-2026 and the roll at the 2026 nominations. The bars start above zero so that the changes can be seen. A reason on the list is what the officer wrote down, and nobody checked it.</a:t>
             </a:r>
             <a:endParaRPr lang="en-US" dirty="0"/>
           </a:p>
@@ -12143,7 +12143,7 @@
       </p:graphicFrame>
       <p:sp>
         <p:nvSpPr>
-          <p:cNvPr id="48" name="Text 45"/>
+          <p:cNvPr id="49" name="Text 45"/>
           <p:cNvSpPr txBox="1"/>
           <p:nvPr/>
         </p:nvSpPr>
@@ -18755,7 +18755,7 @@
                 <a:ea typeface="Calibri" pitchFamily="34" charset="-122"/>
                 <a:cs typeface="Calibri" pitchFamily="34" charset="-120"/>
               </a:rPr>
-              <a:t>In 139 of the 294 constituencies, the roll fell by more than the 2026 winning margin, large enough to decide the seat. At each seat's turnout, 132.</a:t>
+              <a:t>In 139 of the 294 constituencies, the roll fell by more than the 2026 winning margin, large enough to decide the seat. At each seat's turnout the number is 132.</a:t>
             </a:r>
             <a:endParaRPr lang="en-US" sz="1500" dirty="0"/>
           </a:p>

--- a/reports/west-bengal-sir-2026-deck.pptx
+++ b/reports/west-bengal-sir-2026-deck.pptx
@@ -532,73 +532,73 @@
                 <c:formatCode>General</c:formatCode>
                 <c:ptCount val="24"/>
                 <c:pt idx="0">
-                  <c:v>27.98</c:v>
+                  <c:v>27.979</c:v>
                 </c:pt>
                 <c:pt idx="1">
-                  <c:v>24.54</c:v>
+                  <c:v>24.5407</c:v>
                 </c:pt>
                 <c:pt idx="2">
-                  <c:v>14.97</c:v>
+                  <c:v>14.9663</c:v>
                 </c:pt>
                 <c:pt idx="3">
-                  <c:v>14.19</c:v>
+                  <c:v>14.1908</c:v>
                 </c:pt>
                 <c:pt idx="4">
-                  <c:v>13.7</c:v>
+                  <c:v>13.6976</c:v>
                 </c:pt>
                 <c:pt idx="5">
-                  <c:v>13.5</c:v>
+                  <c:v>13.4993</c:v>
                 </c:pt>
                 <c:pt idx="6">
-                  <c:v>12.39</c:v>
+                  <c:v>12.3937</c:v>
                 </c:pt>
                 <c:pt idx="7">
-                  <c:v>12.23</c:v>
+                  <c:v>12.2331</c:v>
                 </c:pt>
                 <c:pt idx="8">
-                  <c:v>11.86</c:v>
+                  <c:v>11.8552</c:v>
                 </c:pt>
                 <c:pt idx="9">
-                  <c:v>11.63</c:v>
+                  <c:v>11.6296</c:v>
                 </c:pt>
                 <c:pt idx="10">
-                  <c:v>10.84</c:v>
+                  <c:v>10.8391</c:v>
                 </c:pt>
                 <c:pt idx="11">
-                  <c:v>10.12</c:v>
+                  <c:v>10.1199</c:v>
                 </c:pt>
                 <c:pt idx="12">
-                  <c:v>9.35</c:v>
+                  <c:v>9.3528</c:v>
                 </c:pt>
                 <c:pt idx="13">
-                  <c:v>9.09</c:v>
+                  <c:v>9.0927</c:v>
                 </c:pt>
                 <c:pt idx="14">
-                  <c:v>8.98</c:v>
+                  <c:v>8.9814</c:v>
                 </c:pt>
                 <c:pt idx="15">
-                  <c:v>8.55</c:v>
+                  <c:v>8.5544</c:v>
                 </c:pt>
                 <c:pt idx="16">
-                  <c:v>7.73</c:v>
+                  <c:v>7.7292</c:v>
                 </c:pt>
                 <c:pt idx="17">
-                  <c:v>7.67</c:v>
+                  <c:v>7.6653</c:v>
                 </c:pt>
                 <c:pt idx="18">
-                  <c:v>7.59</c:v>
+                  <c:v>7.5874</c:v>
                 </c:pt>
                 <c:pt idx="19">
-                  <c:v>5.88</c:v>
+                  <c:v>5.8754</c:v>
                 </c:pt>
                 <c:pt idx="20">
-                  <c:v>5.33</c:v>
+                  <c:v>5.3301</c:v>
                 </c:pt>
                 <c:pt idx="21">
-                  <c:v>4.69</c:v>
+                  <c:v>4.6884</c:v>
                 </c:pt>
                 <c:pt idx="22">
-                  <c:v>3.08</c:v>
+                  <c:v>3.0796</c:v>
                 </c:pt>
                 <c:pt idx="23">
                   <c:v>1.64</c:v>
@@ -1171,10 +1171,10 @@
                     <c:v>North 24 Parganas</c:v>
                   </c:pt>
                   <c:pt idx="16">
-                    <c:v>Jalpaiguri</c:v>
+                    <c:v>Purba Bardhaman</c:v>
                   </c:pt>
                   <c:pt idx="17">
-                    <c:v>Purba Bardhaman</c:v>
+                    <c:v>Jalpaiguri</c:v>
                   </c:pt>
                   <c:pt idx="18">
                     <c:v>Hooghly</c:v>
@@ -1205,76 +1205,76 @@
                 <c:formatCode>General</c:formatCode>
                 <c:ptCount val="24"/>
                 <c:pt idx="0">
-                  <c:v>48.75</c:v>
+                  <c:v>48.7485</c:v>
                 </c:pt>
                 <c:pt idx="1">
-                  <c:v>49.44</c:v>
+                  <c:v>49.4388</c:v>
                 </c:pt>
                 <c:pt idx="2">
-                  <c:v>49.44</c:v>
+                  <c:v>49.4374</c:v>
                 </c:pt>
                 <c:pt idx="3">
-                  <c:v>50.18</c:v>
+                  <c:v>50.1827</c:v>
                 </c:pt>
                 <c:pt idx="4">
-                  <c:v>49.6</c:v>
+                  <c:v>49.596</c:v>
                 </c:pt>
                 <c:pt idx="5">
-                  <c:v>50.66</c:v>
+                  <c:v>50.665</c:v>
                 </c:pt>
                 <c:pt idx="6">
-                  <c:v>48.28</c:v>
+                  <c:v>48.2794</c:v>
                 </c:pt>
                 <c:pt idx="7">
-                  <c:v>49.21</c:v>
+                  <c:v>49.2108</c:v>
                 </c:pt>
                 <c:pt idx="8">
-                  <c:v>49.51</c:v>
+                  <c:v>49.5059</c:v>
                 </c:pt>
                 <c:pt idx="9">
-                  <c:v>49.67</c:v>
+                  <c:v>49.6688</c:v>
                 </c:pt>
                 <c:pt idx="10">
-                  <c:v>49.23</c:v>
+                  <c:v>49.2335</c:v>
                 </c:pt>
                 <c:pt idx="11">
-                  <c:v>48.64</c:v>
+                  <c:v>48.6366</c:v>
                 </c:pt>
                 <c:pt idx="12">
-                  <c:v>49.79</c:v>
+                  <c:v>49.7875</c:v>
                 </c:pt>
                 <c:pt idx="13">
-                  <c:v>48.47</c:v>
+                  <c:v>48.4692</c:v>
                 </c:pt>
                 <c:pt idx="14">
-                  <c:v>48.93</c:v>
+                  <c:v>48.9297</c:v>
                 </c:pt>
                 <c:pt idx="15">
-                  <c:v>49.48</c:v>
+                  <c:v>49.4772</c:v>
                 </c:pt>
                 <c:pt idx="16">
-                  <c:v>49.51</c:v>
+                  <c:v>49.4787</c:v>
                 </c:pt>
                 <c:pt idx="17">
-                  <c:v>49.48</c:v>
+                  <c:v>49.5075</c:v>
                 </c:pt>
                 <c:pt idx="18">
-                  <c:v>49.75</c:v>
+                  <c:v>49.7467</c:v>
                 </c:pt>
                 <c:pt idx="19">
-                  <c:v>48.94</c:v>
+                  <c:v>48.9431</c:v>
                 </c:pt>
                 <c:pt idx="20">
-                  <c:v>49.06</c:v>
+                  <c:v>49.0584</c:v>
                 </c:pt>
                 <c:pt idx="21">
-                  <c:v>50.28</c:v>
+                  <c:v>50.2763</c:v>
                 </c:pt>
                 <c:pt idx="22">
-                  <c:v>45.84</c:v>
+                  <c:v>45.8371</c:v>
                 </c:pt>
                 <c:pt idx="23">
-                  <c:v>46.75</c:v>
+                  <c:v>46.754</c:v>
                 </c:pt>
               </c:numCache>
             </c:numRef>
@@ -1380,10 +1380,10 @@
                     <c:v>North 24 Parganas</c:v>
                   </c:pt>
                   <c:pt idx="16">
-                    <c:v>Jalpaiguri</c:v>
+                    <c:v>Purba Bardhaman</c:v>
                   </c:pt>
                   <c:pt idx="17">
-                    <c:v>Purba Bardhaman</c:v>
+                    <c:v>Jalpaiguri</c:v>
                   </c:pt>
                   <c:pt idx="18">
                     <c:v>Hooghly</c:v>
@@ -1414,76 +1414,76 @@
                 <c:formatCode>General</c:formatCode>
                 <c:ptCount val="24"/>
                 <c:pt idx="0">
-                  <c:v>67.66</c:v>
+                  <c:v>67.658</c:v>
                 </c:pt>
                 <c:pt idx="1">
-                  <c:v>62.1</c:v>
+                  <c:v>62.0996</c:v>
                 </c:pt>
                 <c:pt idx="2">
-                  <c:v>60.71</c:v>
+                  <c:v>60.7145</c:v>
                 </c:pt>
                 <c:pt idx="3">
-                  <c:v>60.91</c:v>
+                  <c:v>60.906</c:v>
                 </c:pt>
                 <c:pt idx="4">
-                  <c:v>58.51</c:v>
+                  <c:v>58.5148</c:v>
                 </c:pt>
                 <c:pt idx="5">
-                  <c:v>58.82</c:v>
+                  <c:v>58.8193</c:v>
                 </c:pt>
                 <c:pt idx="6">
-                  <c:v>55.26</c:v>
+                  <c:v>55.2587</c:v>
                 </c:pt>
                 <c:pt idx="7">
-                  <c:v>55.8</c:v>
+                  <c:v>55.8047</c:v>
                 </c:pt>
                 <c:pt idx="8">
-                  <c:v>55.31</c:v>
+                  <c:v>55.3119</c:v>
                 </c:pt>
                 <c:pt idx="9">
-                  <c:v>55.36</c:v>
+                  <c:v>55.3583</c:v>
                 </c:pt>
                 <c:pt idx="10">
-                  <c:v>54.74</c:v>
+                  <c:v>54.7374</c:v>
                 </c:pt>
                 <c:pt idx="11">
-                  <c:v>53.97</c:v>
+                  <c:v>53.9667</c:v>
                 </c:pt>
                 <c:pt idx="12">
-                  <c:v>54.27</c:v>
+                  <c:v>54.2675</c:v>
                 </c:pt>
                 <c:pt idx="13">
-                  <c:v>52.65</c:v>
+                  <c:v>52.646</c:v>
                 </c:pt>
                 <c:pt idx="14">
-                  <c:v>52.62</c:v>
+                  <c:v>52.617</c:v>
                 </c:pt>
                 <c:pt idx="15">
-                  <c:v>52.11</c:v>
+                  <c:v>52.1132</c:v>
                 </c:pt>
                 <c:pt idx="16">
-                  <c:v>52.09</c:v>
+                  <c:v>52.0648</c:v>
                 </c:pt>
                 <c:pt idx="17">
-                  <c:v>52.06</c:v>
+                  <c:v>52.0911</c:v>
                 </c:pt>
                 <c:pt idx="18">
-                  <c:v>51.56</c:v>
+                  <c:v>51.5633</c:v>
                 </c:pt>
                 <c:pt idx="19">
-                  <c:v>50.42</c:v>
+                  <c:v>50.4159</c:v>
                 </c:pt>
                 <c:pt idx="20">
-                  <c:v>50.32</c:v>
+                  <c:v>50.316</c:v>
                 </c:pt>
                 <c:pt idx="21">
-                  <c:v>50.24</c:v>
+                  <c:v>50.245</c:v>
                 </c:pt>
                 <c:pt idx="22">
-                  <c:v>38.67</c:v>
+                  <c:v>38.6688</c:v>
                 </c:pt>
                 <c:pt idx="23">
-                  <c:v>39.19</c:v>
+                  <c:v>39.1943</c:v>
                 </c:pt>
               </c:numCache>
             </c:numRef>
@@ -1763,40 +1763,40 @@
                 <c:formatCode>General</c:formatCode>
                 <c:ptCount val="12"/>
                 <c:pt idx="0">
-                  <c:v>3.81</c:v>
+                  <c:v>3.8051</c:v>
                 </c:pt>
                 <c:pt idx="1">
-                  <c:v>6.33</c:v>
+                  <c:v>6.3306</c:v>
                 </c:pt>
                 <c:pt idx="2">
-                  <c:v>5.34</c:v>
+                  <c:v>5.3416</c:v>
                 </c:pt>
                 <c:pt idx="3">
-                  <c:v>5.11</c:v>
+                  <c:v>5.1112</c:v>
                 </c:pt>
                 <c:pt idx="4">
-                  <c:v>4.5</c:v>
+                  <c:v>4.499</c:v>
                 </c:pt>
                 <c:pt idx="5">
-                  <c:v>8.89</c:v>
+                  <c:v>8.8869</c:v>
                 </c:pt>
                 <c:pt idx="6">
-                  <c:v>4.18</c:v>
+                  <c:v>4.1825</c:v>
                 </c:pt>
                 <c:pt idx="7">
-                  <c:v>8.81</c:v>
+                  <c:v>8.8084</c:v>
                 </c:pt>
                 <c:pt idx="8">
-                  <c:v>2.95</c:v>
+                  <c:v>2.948</c:v>
                 </c:pt>
                 <c:pt idx="9">
-                  <c:v>5.86</c:v>
+                  <c:v>5.8621</c:v>
                 </c:pt>
                 <c:pt idx="10">
-                  <c:v>6.26</c:v>
+                  <c:v>6.2629</c:v>
                 </c:pt>
                 <c:pt idx="11">
-                  <c:v>5.09</c:v>
+                  <c:v>5.0909</c:v>
                 </c:pt>
               </c:numCache>
             </c:numRef>
@@ -1900,40 +1900,40 @@
                 <c:formatCode>General</c:formatCode>
                 <c:ptCount val="12"/>
                 <c:pt idx="0">
-                  <c:v>11.86</c:v>
+                  <c:v>11.8552</c:v>
                 </c:pt>
                 <c:pt idx="1">
-                  <c:v>14.19</c:v>
+                  <c:v>14.1908</c:v>
                 </c:pt>
                 <c:pt idx="2">
-                  <c:v>12.23</c:v>
+                  <c:v>12.2331</c:v>
                 </c:pt>
                 <c:pt idx="3">
-                  <c:v>11.63</c:v>
+                  <c:v>11.6296</c:v>
                 </c:pt>
                 <c:pt idx="4">
-                  <c:v>10.12</c:v>
+                  <c:v>10.1199</c:v>
                 </c:pt>
                 <c:pt idx="5">
-                  <c:v>13.7</c:v>
+                  <c:v>13.6976</c:v>
                 </c:pt>
                 <c:pt idx="6">
-                  <c:v>8.98</c:v>
+                  <c:v>8.9814</c:v>
                 </c:pt>
                 <c:pt idx="7">
-                  <c:v>13.5</c:v>
+                  <c:v>13.4993</c:v>
                 </c:pt>
                 <c:pt idx="8">
-                  <c:v>7.59</c:v>
+                  <c:v>7.5874</c:v>
                 </c:pt>
                 <c:pt idx="9">
-                  <c:v>9.09</c:v>
+                  <c:v>9.0927</c:v>
                 </c:pt>
                 <c:pt idx="10">
-                  <c:v>9.35</c:v>
+                  <c:v>9.3528</c:v>
                 </c:pt>
                 <c:pt idx="11">
-                  <c:v>7.67</c:v>
+                  <c:v>7.6653</c:v>
                 </c:pt>
               </c:numCache>
             </c:numRef>
@@ -10991,7 +10991,7 @@
                           <a:ea typeface="Calibri" pitchFamily="34" charset="-122"/>
                           <a:cs typeface="Calibri" pitchFamily="34" charset="-120"/>
                         </a:rPr>
-                        <a:t>+4.0</a:t>
+                        <a:t>+4.1</a:t>
                       </a:r>
                       <a:endParaRPr lang="en-US" sz="1200" dirty="0">
                         <a:latin typeface="Calibri" charset="0"/>
@@ -18843,7 +18843,7 @@
                 <a:ea typeface="Calibri" pitchFamily="34" charset="-122"/>
                 <a:cs typeface="Calibri" pitchFamily="34" charset="-120"/>
               </a:rPr>
-              <a:t>41.5% of the names left off were entered as dead, 34.1% as shifted and 21.0% as absent.</a:t>
+              <a:t>41.5% of the names left off were entered as dead, 34.2% as shifted and 21.0% as absent.</a:t>
             </a:r>
             <a:endParaRPr lang="en-US" sz="1500" dirty="0"/>
           </a:p>

--- a/reports/west-bengal-sir-2026-deck.pptx
+++ b/reports/west-bengal-sir-2026-deck.pptx
@@ -5383,7 +5383,7 @@
                 <a:ea typeface="Calibri" pitchFamily="34" charset="-122"/>
                 <a:cs typeface="Calibri" pitchFamily="34" charset="-120"/>
               </a:rPr>
-              <a:t>PinPoint Ventures</a:t>
+              <a:t>ImpactMojo</a:t>
             </a:r>
             <a:endParaRPr lang="en-US" sz="1300" dirty="0"/>
           </a:p>
@@ -6366,7 +6366,7 @@
                 <a:ea typeface="Calibri" pitchFamily="34" charset="-122"/>
                 <a:cs typeface="Calibri" pitchFamily="34" charset="-120"/>
               </a:rPr>
-              <a:t>West Bengal SIR 2026 · PinPoint Ventures · totals only, never names or EPIC numbers</a:t>
+              <a:t>West Bengal SIR 2026 · ImpactMojo · totals only, never names or EPIC numbers</a:t>
             </a:r>
             <a:endParaRPr lang="en-US" sz="900" dirty="0"/>
           </a:p>
@@ -7491,7 +7491,7 @@
                 <a:ea typeface="Calibri" pitchFamily="34" charset="-122"/>
                 <a:cs typeface="Calibri" pitchFamily="34" charset="-120"/>
               </a:rPr>
-              <a:t>West Bengal SIR 2026 · PinPoint Ventures · totals only, never names or EPIC numbers</a:t>
+              <a:t>West Bengal SIR 2026 · ImpactMojo · totals only, never names or EPIC numbers</a:t>
             </a:r>
             <a:endParaRPr lang="en-US" sz="900" dirty="0"/>
           </a:p>
@@ -8869,7 +8869,7 @@
                 <a:ea typeface="Calibri" pitchFamily="34" charset="-122"/>
                 <a:cs typeface="Calibri" pitchFamily="34" charset="-120"/>
               </a:rPr>
-              <a:t>West Bengal SIR 2026 · PinPoint Ventures · totals only, never names or EPIC numbers</a:t>
+              <a:t>West Bengal SIR 2026 · ImpactMojo · totals only, never names or EPIC numbers</a:t>
             </a:r>
             <a:endParaRPr lang="en-US" sz="900" dirty="0"/>
           </a:p>
@@ -12366,7 +12366,7 @@
                 <a:ea typeface="Calibri" pitchFamily="34" charset="-122"/>
                 <a:cs typeface="Calibri" pitchFamily="34" charset="-120"/>
               </a:rPr>
-              <a:t>West Bengal SIR 2026 · PinPoint Ventures · totals only, never names or EPIC numbers</a:t>
+              <a:t>West Bengal SIR 2026 · ImpactMojo · totals only, never names or EPIC numbers</a:t>
             </a:r>
             <a:endParaRPr lang="en-US" sz="900" dirty="0"/>
           </a:p>
@@ -13519,7 +13519,7 @@
                 <a:ea typeface="Calibri" pitchFamily="34" charset="-122"/>
                 <a:cs typeface="Calibri" pitchFamily="34" charset="-120"/>
               </a:rPr>
-              <a:t>West Bengal SIR 2026 · PinPoint Ventures · totals only, never names or EPIC numbers</a:t>
+              <a:t>West Bengal SIR 2026 · ImpactMojo · totals only, never names or EPIC numbers</a:t>
             </a:r>
             <a:endParaRPr lang="en-US" sz="900" dirty="0"/>
           </a:p>
@@ -14636,7 +14636,7 @@
                 <a:ea typeface="Calibri" pitchFamily="34" charset="-122"/>
                 <a:cs typeface="Calibri" pitchFamily="34" charset="-120"/>
               </a:rPr>
-              <a:t>West Bengal SIR 2026 · PinPoint Ventures · totals only, never names or EPIC numbers</a:t>
+              <a:t>West Bengal SIR 2026 · ImpactMojo · totals only, never names or EPIC numbers</a:t>
             </a:r>
             <a:endParaRPr lang="en-US" sz="900" dirty="0"/>
           </a:p>
@@ -15737,7 +15737,7 @@
                 <a:ea typeface="Calibri" pitchFamily="34" charset="-122"/>
                 <a:cs typeface="Calibri" pitchFamily="34" charset="-120"/>
               </a:rPr>
-              <a:t>PinPoint Ventures</a:t>
+              <a:t>ImpactMojo</a:t>
             </a:r>
             <a:endParaRPr lang="en-US" sz="1700" dirty="0"/>
           </a:p>
@@ -17848,7 +17848,7 @@
                 <a:ea typeface="Calibri" pitchFamily="34" charset="-122"/>
                 <a:cs typeface="Calibri" pitchFamily="34" charset="-120"/>
               </a:rPr>
-              <a:t>West Bengal SIR 2026 · PinPoint Ventures · totals only, never names or EPIC numbers</a:t>
+              <a:t>West Bengal SIR 2026 · ImpactMojo · totals only, never names or EPIC numbers</a:t>
             </a:r>
             <a:endParaRPr lang="en-US" sz="900" dirty="0"/>
           </a:p>
@@ -19070,7 +19070,7 @@
                 <a:ea typeface="Calibri" pitchFamily="34" charset="-122"/>
                 <a:cs typeface="Calibri" pitchFamily="34" charset="-120"/>
               </a:rPr>
-              <a:t>West Bengal SIR 2026 · PinPoint Ventures · totals only, never names or EPIC numbers</a:t>
+              <a:t>West Bengal SIR 2026 · ImpactMojo · totals only, never names or EPIC numbers</a:t>
             </a:r>
             <a:endParaRPr lang="en-US" sz="900" dirty="0"/>
           </a:p>
@@ -21339,7 +21339,7 @@
                 <a:ea typeface="Calibri" pitchFamily="34" charset="-122"/>
                 <a:cs typeface="Calibri" pitchFamily="34" charset="-120"/>
               </a:rPr>
-              <a:t>West Bengal SIR 2026 · PinPoint Ventures · totals only, never names or EPIC numbers</a:t>
+              <a:t>West Bengal SIR 2026 · ImpactMojo · totals only, never names or EPIC numbers</a:t>
             </a:r>
             <a:endParaRPr lang="en-US" sz="900" dirty="0"/>
           </a:p>
@@ -22689,7 +22689,7 @@
                 <a:ea typeface="Calibri" pitchFamily="34" charset="-122"/>
                 <a:cs typeface="Calibri" pitchFamily="34" charset="-120"/>
               </a:rPr>
-              <a:t>West Bengal SIR 2026 · PinPoint Ventures · totals only, never names or EPIC numbers</a:t>
+              <a:t>West Bengal SIR 2026 · ImpactMojo · totals only, never names or EPIC numbers</a:t>
             </a:r>
             <a:endParaRPr lang="en-US" sz="900" dirty="0"/>
           </a:p>
@@ -23814,7 +23814,7 @@
                 <a:ea typeface="Calibri" pitchFamily="34" charset="-122"/>
                 <a:cs typeface="Calibri" pitchFamily="34" charset="-120"/>
               </a:rPr>
-              <a:t>West Bengal SIR 2026 · PinPoint Ventures · totals only, never names or EPIC numbers</a:t>
+              <a:t>West Bengal SIR 2026 · ImpactMojo · totals only, never names or EPIC numbers</a:t>
             </a:r>
             <a:endParaRPr lang="en-US" sz="900" dirty="0"/>
           </a:p>
@@ -24918,7 +24918,7 @@
                 <a:ea typeface="Calibri" pitchFamily="34" charset="-122"/>
                 <a:cs typeface="Calibri" pitchFamily="34" charset="-120"/>
               </a:rPr>
-              <a:t>West Bengal SIR 2026 · PinPoint Ventures · totals only, never names or EPIC numbers</a:t>
+              <a:t>West Bengal SIR 2026 · ImpactMojo · totals only, never names or EPIC numbers</a:t>
             </a:r>
             <a:endParaRPr lang="en-US" sz="900" dirty="0"/>
           </a:p>
@@ -26043,7 +26043,7 @@
                 <a:ea typeface="Calibri" pitchFamily="34" charset="-122"/>
                 <a:cs typeface="Calibri" pitchFamily="34" charset="-120"/>
               </a:rPr>
-              <a:t>West Bengal SIR 2026 · PinPoint Ventures · totals only, never names or EPIC numbers</a:t>
+              <a:t>West Bengal SIR 2026 · ImpactMojo · totals only, never names or EPIC numbers</a:t>
             </a:r>
             <a:endParaRPr lang="en-US" sz="900" dirty="0"/>
           </a:p>

--- a/reports/west-bengal-sir-2026-deck.pptx
+++ b/reports/west-bengal-sir-2026-deck.pptx
@@ -3122,7 +3122,7 @@
           <a:p>
             <a:r>
               <a:rPr lang="en-US" dirty="0"/>
-              <a:t>The Special Intensive Revision (SIR) is the Election Commission's house-to-house recheck of the electoral roll, the list of people entitled to vote. Adjudication means the names were kept off the final roll while judicial officers decided whether each elector was eligible. The removals and their reasons are published for the state only. Below the state the deck measures the fall in the roll from 2024, which takes in ordinary changes as well as the revision and is a different count from the names struck off.</a:t>
+              <a:t>The Special Intensive Revision (SIR) is the Election Commission's house-to-house recheck of the electoral roll, the list of people entitled to vote. Adjudication means the names were kept off the final roll while judicial officers decided whether each elector was eligible. The names left off the draft and their reasons are published for the state only. Below the state the deck measures the fall in the roll from 2024, which takes in ordinary changes as well as the revision and is a different count from the names left off the draft.</a:t>
             </a:r>
             <a:endParaRPr lang="en-US" dirty="0"/>
           </a:p>
@@ -3914,7 +3914,7 @@
           <a:p>
             <a:r>
               <a:rPr lang="en-US" dirty="0"/>
-              <a:t>Per 100 electors is the number for every 100 people on the earlier roll, which lets places of different size be compared. The fall in the roll is the earlier roll less the later one, so it counts names removed less names added, ordinary deaths and moves included. The winning margin is the winner's votes less the runner-up's.</a:t>
+              <a:t>Per 100 electors is the number for every 100 people on the earlier roll, which lets places of different size be compared. The fall in the roll is the earlier roll less the later one, so it counts names left off or deleted less names added, ordinary deaths and moves included. The winning margin is the winner's votes less the runner-up's.</a:t>
             </a:r>
             <a:endParaRPr lang="en-US" dirty="0"/>
           </a:p>
@@ -4002,7 +4002,7 @@
           <a:p>
             <a:r>
               <a:rPr lang="en-US" dirty="0"/>
-              <a:t>A claim asks for a name to be added to the draft, and an objection asks for one to be removed. From press note PN-05-2026 and the roll at the 2026 nominations. The bars start above zero so that the changes can be seen. A reason on the list is what the officer wrote down, and nobody checked it.</a:t>
+              <a:t>A claim asks for a name to be added to the draft, and an objection asks for one to be deleted. From press note PN-05-2026 and the roll at the 2026 nominations. The bars start above zero so that the changes can be seen. A reason on the list is what the officer wrote down, and nobody checked it.</a:t>
             </a:r>
             <a:endParaRPr lang="en-US" dirty="0"/>
           </a:p>
@@ -13331,7 +13331,7 @@
                 <a:ea typeface="Calibri" pitchFamily="34" charset="-122"/>
                 <a:cs typeface="Calibri" pitchFamily="34" charset="-120"/>
               </a:rPr>
-              <a:t>How many names were removed in each district or constituency, or why. Where the names held back were. Whether each removal was right, or how anyone missing from the roll would have voted.</a:t>
+              <a:t>How many names were left off the draft in each district or constituency, or why. Where the names held back were. Whether each name was rightly left off or deleted, or how anyone missing from the roll would have voted.</a:t>
             </a:r>
             <a:endParaRPr lang="en-US" sz="1500" dirty="0"/>
           </a:p>
@@ -13480,7 +13480,7 @@
                 <a:ea typeface="Cambria" pitchFamily="34" charset="-122"/>
                 <a:cs typeface="Cambria" pitchFamily="34" charset="-120"/>
               </a:rPr>
-              <a:t>Publish the removals and adjudication where they happened</a:t>
+              <a:t>Publish the names left off and adjudication where they happened</a:t>
             </a:r>
             <a:endParaRPr lang="en-US" sz="2700" dirty="0"/>
           </a:p>
@@ -14404,7 +14404,7 @@
                 <a:ea typeface="Calibri" pitchFamily="34" charset="-122"/>
                 <a:cs typeface="Calibri" pitchFamily="34" charset="-120"/>
               </a:rPr>
-              <a:t>Publish the names removed by constituency and polling station, with the reason and the sex of each.</a:t>
+              <a:t>Publish the names left off by constituency and polling station, with the reason and the sex of each.</a:t>
             </a:r>
             <a:endParaRPr lang="en-US" sz="1700" dirty="0"/>
           </a:p>
@@ -14448,7 +14448,7 @@
                 <a:ea typeface="Calibri" pitchFamily="34" charset="-122"/>
                 <a:cs typeface="Calibri" pitchFamily="34" charset="-120"/>
               </a:rPr>
-              <a:t>Decide the 37.1 lakh appeals still pending, and publish what each decision restored or removed.</a:t>
+              <a:t>Decide the 37.1 lakh appeals still pending, and publish what each decision restored or deleted.</a:t>
             </a:r>
             <a:endParaRPr lang="en-US" sz="1700" dirty="0"/>
           </a:p>
@@ -15541,7 +15541,7 @@
                 <a:ea typeface="Calibri" pitchFamily="34" charset="-122"/>
                 <a:cs typeface="Calibri" pitchFamily="34" charset="-120"/>
               </a:rPr>
-              <a:t>The rolls at the 2024 Lok Sabha nominations, the draft of 16 December 2025 and the 2026 nominations are the Chief Electoral Officer's tables by constituency and sex. The fall between them is never called the removals.</a:t>
+              <a:t>The rolls at the 2024 Lok Sabha nominations, the draft of 16 December 2025 and the 2026 nominations are the Chief Electoral Officer's tables by constituency and sex. The fall between them is never called the names left off.</a:t>
             </a:r>
             <a:endParaRPr lang="en-US" sz="1500" dirty="0"/>
           </a:p>
@@ -20725,7 +20725,7 @@
                 <a:ea typeface="Calibri" pitchFamily="34" charset="-122"/>
                 <a:cs typeface="Calibri" pitchFamily="34" charset="-120"/>
               </a:rPr>
-              <a:t>Removed on objections</a:t>
+              <a:t>Deleted on objections</a:t>
             </a:r>
             <a:endParaRPr lang="en-US" sz="1000" dirty="0"/>
           </a:p>
@@ -23589,7 +23589,7 @@
                 <a:ea typeface="Calibri" pitchFamily="34" charset="-122"/>
                 <a:cs typeface="Calibri" pitchFamily="34" charset="-120"/>
               </a:rPr>
-              <a:t>No count of the names removed is published below the state, so this is the fall in the roll.</a:t>
+              <a:t>No count of the names left off the draft is published below the state, so this is the fall in the roll.</a:t>
             </a:r>
             <a:endParaRPr lang="en-US" sz="1300" dirty="0"/>
           </a:p>
